--- a/docs/答辩演示PPT.pptx
+++ b/docs/答辩演示PPT.pptx
@@ -17,6 +17,7 @@
     <p:sldId id="265" r:id="rId16"/>
     <p:sldId id="266" r:id="rId17"/>
     <p:sldId id="267" r:id="rId18"/>
+    <p:sldId id="269" r:id="rId20"/>
     <p:sldId id="268" r:id="rId19"/>
   </p:sldIdLst>
   <p:sldSz cx="12191695" cy="6858000" type="screen4x3"/>
@@ -4456,6 +4457,832 @@
                 <a:ea typeface="微软雅黑"/>
               </a:rPr>
               <a:t>在线体验:loan-helper-665l.onrender.com</a:t>
+            </a:r>
+          </a:p>
+        </p:txBody>
+      </p:sp>
+    </p:spTree>
+  </p:cSld>
+  <p:clrMapOvr>
+    <a:masterClrMapping/>
+  </p:clrMapOvr>
+</p:sld>
+</file>
+
+<file path=ppt/slides/slide14.xml><?xml version="1.0" encoding="utf-8"?>
+<p:sld xmlns:a="http://schemas.openxmlformats.org/drawingml/2006/main" xmlns:p="http://schemas.openxmlformats.org/presentationml/2006/main" xmlns:r="http://schemas.openxmlformats.org/officeDocument/2006/relationships">
+  <p:cSld>
+    <p:bg>
+      <p:bgPr>
+        <a:solidFill>
+          <a:srgbClr val="FFFFFF"/>
+        </a:solidFill>
+        <a:effectLst/>
+      </p:bgPr>
+    </p:bg>
+    <p:spTree>
+      <p:nvGrpSpPr>
+        <p:cNvPr id="1" name=""/>
+        <p:cNvGrpSpPr/>
+        <p:nvPr/>
+      </p:nvGrpSpPr>
+      <p:grpSpPr/>
+      <p:sp>
+        <p:nvSpPr>
+          <p:cNvPr id="2" name="Rectangle 1"/>
+          <p:cNvSpPr/>
+          <p:nvPr/>
+        </p:nvSpPr>
+        <p:spPr>
+          <a:xfrm>
+            <a:off x="0" y="0"/>
+            <a:ext cx="12191695" cy="1051560"/>
+          </a:xfrm>
+          <a:prstGeom prst="rect">
+            <a:avLst/>
+          </a:prstGeom>
+          <a:solidFill>
+            <a:srgbClr val="1F3D66"/>
+          </a:solidFill>
+          <a:ln>
+            <a:noFill/>
+          </a:ln>
+          <a:effectLst/>
+        </p:spPr>
+        <p:style>
+          <a:lnRef idx="1">
+            <a:schemeClr val="accent1"/>
+          </a:lnRef>
+          <a:fillRef idx="3">
+            <a:schemeClr val="accent1"/>
+          </a:fillRef>
+          <a:effectRef idx="2">
+            <a:schemeClr val="accent1"/>
+          </a:effectRef>
+          <a:fontRef idx="minor">
+            <a:schemeClr val="lt1"/>
+          </a:fontRef>
+        </p:style>
+        <p:txBody>
+          <a:bodyPr rtlCol="0" anchor="ctr"/>
+          <a:lstStyle/>
+          <a:p>
+            <a:pPr algn="ctr"/>
+          </a:p>
+        </p:txBody>
+      </p:sp>
+      <p:sp>
+        <p:nvSpPr>
+          <p:cNvPr id="3" name="Rectangle 2"/>
+          <p:cNvSpPr/>
+          <p:nvPr/>
+        </p:nvSpPr>
+        <p:spPr>
+          <a:xfrm>
+            <a:off x="0" y="1051560"/>
+            <a:ext cx="12191695" cy="50800"/>
+          </a:xfrm>
+          <a:prstGeom prst="rect">
+            <a:avLst/>
+          </a:prstGeom>
+          <a:solidFill>
+            <a:srgbClr val="E88A2E"/>
+          </a:solidFill>
+          <a:ln>
+            <a:noFill/>
+          </a:ln>
+          <a:effectLst/>
+        </p:spPr>
+        <p:style>
+          <a:lnRef idx="1">
+            <a:schemeClr val="accent1"/>
+          </a:lnRef>
+          <a:fillRef idx="3">
+            <a:schemeClr val="accent1"/>
+          </a:fillRef>
+          <a:effectRef idx="2">
+            <a:schemeClr val="accent1"/>
+          </a:effectRef>
+          <a:fontRef idx="minor">
+            <a:schemeClr val="lt1"/>
+          </a:fontRef>
+        </p:style>
+        <p:txBody>
+          <a:bodyPr rtlCol="0" anchor="ctr"/>
+          <a:lstStyle/>
+          <a:p>
+            <a:pPr algn="ctr"/>
+          </a:p>
+        </p:txBody>
+      </p:sp>
+      <p:sp>
+        <p:nvSpPr>
+          <p:cNvPr id="4" name="TextBox 3"/>
+          <p:cNvSpPr txBox="1"/>
+          <p:nvPr/>
+        </p:nvSpPr>
+        <p:spPr>
+          <a:xfrm>
+            <a:off x="548640" y="137160"/>
+            <a:ext cx="10972800" cy="777240"/>
+          </a:xfrm>
+          <a:prstGeom prst="rect">
+            <a:avLst/>
+          </a:prstGeom>
+          <a:noFill/>
+        </p:spPr>
+        <p:txBody>
+          <a:bodyPr wrap="square" anchor="ctr" lIns="76200" rIns="76200" tIns="25400" bIns="25400">
+            <a:spAutoFit/>
+          </a:bodyPr>
+          <a:lstStyle/>
+          <a:p>
+            <a:r>
+              <a:rPr sz="2800" b="1">
+                <a:solidFill>
+                  <a:srgbClr val="FFFFFF"/>
+                </a:solidFill>
+                <a:latin typeface="微软雅黑"/>
+                <a:ea typeface="微软雅黑"/>
+              </a:rPr>
+              <a:t>项目挑战与应对</a:t>
+            </a:r>
+          </a:p>
+        </p:txBody>
+      </p:sp>
+      <p:sp>
+        <p:nvSpPr>
+          <p:cNvPr id="5" name="Rectangle 4"/>
+          <p:cNvSpPr/>
+          <p:nvPr/>
+        </p:nvSpPr>
+        <p:spPr>
+          <a:xfrm>
+            <a:off x="457200" y="1417320"/>
+            <a:ext cx="3576218" cy="4846320"/>
+          </a:xfrm>
+          <a:prstGeom prst="rect">
+            <a:avLst/>
+          </a:prstGeom>
+          <a:solidFill>
+            <a:srgbClr val="EEF3F9"/>
+          </a:solidFill>
+          <a:ln>
+            <a:noFill/>
+          </a:ln>
+          <a:effectLst/>
+        </p:spPr>
+        <p:style>
+          <a:lnRef idx="1">
+            <a:schemeClr val="accent1"/>
+          </a:lnRef>
+          <a:fillRef idx="3">
+            <a:schemeClr val="accent1"/>
+          </a:fillRef>
+          <a:effectRef idx="2">
+            <a:schemeClr val="accent1"/>
+          </a:effectRef>
+          <a:fontRef idx="minor">
+            <a:schemeClr val="lt1"/>
+          </a:fontRef>
+        </p:style>
+        <p:txBody>
+          <a:bodyPr rtlCol="0" anchor="ctr"/>
+          <a:lstStyle/>
+          <a:p>
+            <a:pPr algn="ctr"/>
+          </a:p>
+        </p:txBody>
+      </p:sp>
+      <p:sp>
+        <p:nvSpPr>
+          <p:cNvPr id="6" name="Rectangle 5"/>
+          <p:cNvSpPr/>
+          <p:nvPr/>
+        </p:nvSpPr>
+        <p:spPr>
+          <a:xfrm>
+            <a:off x="457200" y="1417320"/>
+            <a:ext cx="3576218" cy="566928"/>
+          </a:xfrm>
+          <a:prstGeom prst="rect">
+            <a:avLst/>
+          </a:prstGeom>
+          <a:solidFill>
+            <a:srgbClr val="2E7D5B"/>
+          </a:solidFill>
+          <a:ln>
+            <a:noFill/>
+          </a:ln>
+          <a:effectLst/>
+        </p:spPr>
+        <p:style>
+          <a:lnRef idx="1">
+            <a:schemeClr val="accent1"/>
+          </a:lnRef>
+          <a:fillRef idx="3">
+            <a:schemeClr val="accent1"/>
+          </a:fillRef>
+          <a:effectRef idx="2">
+            <a:schemeClr val="accent1"/>
+          </a:effectRef>
+          <a:fontRef idx="minor">
+            <a:schemeClr val="lt1"/>
+          </a:fontRef>
+        </p:style>
+        <p:txBody>
+          <a:bodyPr rtlCol="0" anchor="ctr"/>
+          <a:lstStyle/>
+          <a:p>
+            <a:pPr algn="ctr"/>
+          </a:p>
+        </p:txBody>
+      </p:sp>
+      <p:sp>
+        <p:nvSpPr>
+          <p:cNvPr id="7" name="TextBox 6"/>
+          <p:cNvSpPr txBox="1"/>
+          <p:nvPr/>
+        </p:nvSpPr>
+        <p:spPr>
+          <a:xfrm>
+            <a:off x="457200" y="1417320"/>
+            <a:ext cx="3576218" cy="566928"/>
+          </a:xfrm>
+          <a:prstGeom prst="rect">
+            <a:avLst/>
+          </a:prstGeom>
+          <a:noFill/>
+        </p:spPr>
+        <p:txBody>
+          <a:bodyPr wrap="square" anchor="ctr" lIns="76200" rIns="76200" tIns="25400" bIns="25400">
+            <a:spAutoFit/>
+          </a:bodyPr>
+          <a:lstStyle/>
+          <a:p>
+            <a:r>
+              <a:rPr sz="1600" b="1">
+                <a:solidFill>
+                  <a:srgbClr val="FFFFFF"/>
+                </a:solidFill>
+                <a:latin typeface="微软雅黑"/>
+                <a:ea typeface="微软雅黑"/>
+              </a:rPr>
+              <a:t>🚀 部署上线</a:t>
+            </a:r>
+          </a:p>
+        </p:txBody>
+      </p:sp>
+      <p:sp>
+        <p:nvSpPr>
+          <p:cNvPr id="8" name="TextBox 7"/>
+          <p:cNvSpPr txBox="1"/>
+          <p:nvPr/>
+        </p:nvSpPr>
+        <p:spPr>
+          <a:xfrm>
+            <a:off x="566928" y="2103120"/>
+            <a:ext cx="3356762" cy="4023360"/>
+          </a:xfrm>
+          <a:prstGeom prst="rect">
+            <a:avLst/>
+          </a:prstGeom>
+          <a:noFill/>
+        </p:spPr>
+        <p:txBody>
+          <a:bodyPr wrap="square">
+            <a:spAutoFit/>
+          </a:bodyPr>
+          <a:lstStyle/>
+          <a:p>
+            <a:pPr>
+              <a:spcAft>
+                <a:spcPts val="900"/>
+              </a:spcAft>
+            </a:pPr>
+            <a:r>
+              <a:rPr sz="1250" b="0">
+                <a:solidFill>
+                  <a:srgbClr val="404040"/>
+                </a:solidFill>
+                <a:latin typeface="微软雅黑"/>
+                <a:ea typeface="微软雅黑"/>
+              </a:rPr>
+              <a:t>• 临时隧道关机即失效 → 转为部署上云</a:t>
+            </a:r>
+          </a:p>
+          <a:p>
+            <a:pPr>
+              <a:spcAft>
+                <a:spcPts val="900"/>
+              </a:spcAft>
+            </a:pPr>
+            <a:r>
+              <a:rPr sz="1250" b="0">
+                <a:solidFill>
+                  <a:srgbClr val="404040"/>
+                </a:solidFill>
+                <a:latin typeface="微软雅黑"/>
+                <a:ea typeface="微软雅黑"/>
+              </a:rPr>
+              <a:t>• 平台碰壁(403/收费) → 选定免费 Render</a:t>
+            </a:r>
+          </a:p>
+          <a:p>
+            <a:pPr>
+              <a:spcAft>
+                <a:spcPts val="900"/>
+              </a:spcAft>
+            </a:pPr>
+            <a:r>
+              <a:rPr sz="1250" b="0">
+                <a:solidFill>
+                  <a:srgbClr val="404040"/>
+                </a:solidFill>
+                <a:latin typeface="微软雅黑"/>
+                <a:ea typeface="微软雅黑"/>
+              </a:rPr>
+              <a:t>• 无账号+推送卡登录 → 令牌鉴权且不残留</a:t>
+            </a:r>
+          </a:p>
+          <a:p>
+            <a:pPr>
+              <a:spcAft>
+                <a:spcPts val="900"/>
+              </a:spcAft>
+            </a:pPr>
+            <a:r>
+              <a:rPr sz="1250" b="0">
+                <a:solidFill>
+                  <a:srgbClr val="404040"/>
+                </a:solidFill>
+                <a:latin typeface="微软雅黑"/>
+                <a:ea typeface="微软雅黑"/>
+              </a:rPr>
+              <a:t>• 免费实例休眠 → 演示前先唤醒</a:t>
+            </a:r>
+          </a:p>
+          <a:p>
+            <a:pPr>
+              <a:spcAft>
+                <a:spcPts val="900"/>
+              </a:spcAft>
+            </a:pPr>
+            <a:r>
+              <a:rPr sz="1250" b="0">
+                <a:solidFill>
+                  <a:srgbClr val="404040"/>
+                </a:solidFill>
+                <a:latin typeface="微软雅黑"/>
+                <a:ea typeface="微软雅黑"/>
+              </a:rPr>
+              <a:t>• 更新繁琐 → 一键部署脚本自动化</a:t>
+            </a:r>
+          </a:p>
+        </p:txBody>
+      </p:sp>
+      <p:sp>
+        <p:nvSpPr>
+          <p:cNvPr id="9" name="Rectangle 8"/>
+          <p:cNvSpPr/>
+          <p:nvPr/>
+        </p:nvSpPr>
+        <p:spPr>
+          <a:xfrm>
+            <a:off x="4307738" y="1417320"/>
+            <a:ext cx="3576218" cy="4846320"/>
+          </a:xfrm>
+          <a:prstGeom prst="rect">
+            <a:avLst/>
+          </a:prstGeom>
+          <a:solidFill>
+            <a:srgbClr val="EEF3F9"/>
+          </a:solidFill>
+          <a:ln>
+            <a:noFill/>
+          </a:ln>
+          <a:effectLst/>
+        </p:spPr>
+        <p:style>
+          <a:lnRef idx="1">
+            <a:schemeClr val="accent1"/>
+          </a:lnRef>
+          <a:fillRef idx="3">
+            <a:schemeClr val="accent1"/>
+          </a:fillRef>
+          <a:effectRef idx="2">
+            <a:schemeClr val="accent1"/>
+          </a:effectRef>
+          <a:fontRef idx="minor">
+            <a:schemeClr val="lt1"/>
+          </a:fontRef>
+        </p:style>
+        <p:txBody>
+          <a:bodyPr rtlCol="0" anchor="ctr"/>
+          <a:lstStyle/>
+          <a:p>
+            <a:pPr algn="ctr"/>
+          </a:p>
+        </p:txBody>
+      </p:sp>
+      <p:sp>
+        <p:nvSpPr>
+          <p:cNvPr id="10" name="Rectangle 9"/>
+          <p:cNvSpPr/>
+          <p:nvPr/>
+        </p:nvSpPr>
+        <p:spPr>
+          <a:xfrm>
+            <a:off x="4307738" y="1417320"/>
+            <a:ext cx="3576218" cy="566928"/>
+          </a:xfrm>
+          <a:prstGeom prst="rect">
+            <a:avLst/>
+          </a:prstGeom>
+          <a:solidFill>
+            <a:srgbClr val="2F5B8C"/>
+          </a:solidFill>
+          <a:ln>
+            <a:noFill/>
+          </a:ln>
+          <a:effectLst/>
+        </p:spPr>
+        <p:style>
+          <a:lnRef idx="1">
+            <a:schemeClr val="accent1"/>
+          </a:lnRef>
+          <a:fillRef idx="3">
+            <a:schemeClr val="accent1"/>
+          </a:fillRef>
+          <a:effectRef idx="2">
+            <a:schemeClr val="accent1"/>
+          </a:effectRef>
+          <a:fontRef idx="minor">
+            <a:schemeClr val="lt1"/>
+          </a:fontRef>
+        </p:style>
+        <p:txBody>
+          <a:bodyPr rtlCol="0" anchor="ctr"/>
+          <a:lstStyle/>
+          <a:p>
+            <a:pPr algn="ctr"/>
+          </a:p>
+        </p:txBody>
+      </p:sp>
+      <p:sp>
+        <p:nvSpPr>
+          <p:cNvPr id="11" name="TextBox 10"/>
+          <p:cNvSpPr txBox="1"/>
+          <p:nvPr/>
+        </p:nvSpPr>
+        <p:spPr>
+          <a:xfrm>
+            <a:off x="4307738" y="1417320"/>
+            <a:ext cx="3576218" cy="566928"/>
+          </a:xfrm>
+          <a:prstGeom prst="rect">
+            <a:avLst/>
+          </a:prstGeom>
+          <a:noFill/>
+        </p:spPr>
+        <p:txBody>
+          <a:bodyPr wrap="square" anchor="ctr" lIns="76200" rIns="76200" tIns="25400" bIns="25400">
+            <a:spAutoFit/>
+          </a:bodyPr>
+          <a:lstStyle/>
+          <a:p>
+            <a:r>
+              <a:rPr sz="1600" b="1">
+                <a:solidFill>
+                  <a:srgbClr val="FFFFFF"/>
+                </a:solidFill>
+                <a:latin typeface="微软雅黑"/>
+                <a:ea typeface="微软雅黑"/>
+              </a:rPr>
+              <a:t>🎯 产品交互</a:t>
+            </a:r>
+          </a:p>
+        </p:txBody>
+      </p:sp>
+      <p:sp>
+        <p:nvSpPr>
+          <p:cNvPr id="12" name="TextBox 11"/>
+          <p:cNvSpPr txBox="1"/>
+          <p:nvPr/>
+        </p:nvSpPr>
+        <p:spPr>
+          <a:xfrm>
+            <a:off x="4417466" y="2103120"/>
+            <a:ext cx="3356762" cy="4023360"/>
+          </a:xfrm>
+          <a:prstGeom prst="rect">
+            <a:avLst/>
+          </a:prstGeom>
+          <a:noFill/>
+        </p:spPr>
+        <p:txBody>
+          <a:bodyPr wrap="square">
+            <a:spAutoFit/>
+          </a:bodyPr>
+          <a:lstStyle/>
+          <a:p>
+            <a:pPr>
+              <a:spcAft>
+                <a:spcPts val="900"/>
+              </a:spcAft>
+            </a:pPr>
+            <a:r>
+              <a:rPr sz="1250" b="0">
+                <a:solidFill>
+                  <a:srgbClr val="404040"/>
+                </a:solidFill>
+                <a:latin typeface="微软雅黑"/>
+                <a:ea typeface="微软雅黑"/>
+              </a:rPr>
+              <a:t>• 结果页信息过载 → 精简版+查看更多</a:t>
+            </a:r>
+          </a:p>
+          <a:p>
+            <a:pPr>
+              <a:spcAft>
+                <a:spcPts val="900"/>
+              </a:spcAft>
+            </a:pPr>
+            <a:r>
+              <a:rPr sz="1250" b="0">
+                <a:solidFill>
+                  <a:srgbClr val="404040"/>
+                </a:solidFill>
+                <a:latin typeface="微软雅黑"/>
+                <a:ea typeface="微软雅黑"/>
+              </a:rPr>
+              <a:t>• 看不懂专业话术 → 说人话版+名词小课堂</a:t>
+            </a:r>
+          </a:p>
+          <a:p>
+            <a:pPr>
+              <a:spcAft>
+                <a:spcPts val="900"/>
+              </a:spcAft>
+            </a:pPr>
+            <a:r>
+              <a:rPr sz="1250" b="0">
+                <a:solidFill>
+                  <a:srgbClr val="404040"/>
+                </a:solidFill>
+                <a:latin typeface="微软雅黑"/>
+                <a:ea typeface="微软雅黑"/>
+              </a:rPr>
+              <a:t>• 城市区县列表不全 → 补全区县数据</a:t>
+            </a:r>
+          </a:p>
+        </p:txBody>
+      </p:sp>
+      <p:sp>
+        <p:nvSpPr>
+          <p:cNvPr id="13" name="Rectangle 12"/>
+          <p:cNvSpPr/>
+          <p:nvPr/>
+        </p:nvSpPr>
+        <p:spPr>
+          <a:xfrm>
+            <a:off x="8158276" y="1417320"/>
+            <a:ext cx="3576218" cy="4846320"/>
+          </a:xfrm>
+          <a:prstGeom prst="rect">
+            <a:avLst/>
+          </a:prstGeom>
+          <a:solidFill>
+            <a:srgbClr val="EEF3F9"/>
+          </a:solidFill>
+          <a:ln>
+            <a:noFill/>
+          </a:ln>
+          <a:effectLst/>
+        </p:spPr>
+        <p:style>
+          <a:lnRef idx="1">
+            <a:schemeClr val="accent1"/>
+          </a:lnRef>
+          <a:fillRef idx="3">
+            <a:schemeClr val="accent1"/>
+          </a:fillRef>
+          <a:effectRef idx="2">
+            <a:schemeClr val="accent1"/>
+          </a:effectRef>
+          <a:fontRef idx="minor">
+            <a:schemeClr val="lt1"/>
+          </a:fontRef>
+        </p:style>
+        <p:txBody>
+          <a:bodyPr rtlCol="0" anchor="ctr"/>
+          <a:lstStyle/>
+          <a:p>
+            <a:pPr algn="ctr"/>
+          </a:p>
+        </p:txBody>
+      </p:sp>
+      <p:sp>
+        <p:nvSpPr>
+          <p:cNvPr id="14" name="Rectangle 13"/>
+          <p:cNvSpPr/>
+          <p:nvPr/>
+        </p:nvSpPr>
+        <p:spPr>
+          <a:xfrm>
+            <a:off x="8158276" y="1417320"/>
+            <a:ext cx="3576218" cy="566928"/>
+          </a:xfrm>
+          <a:prstGeom prst="rect">
+            <a:avLst/>
+          </a:prstGeom>
+          <a:solidFill>
+            <a:srgbClr val="E88A2E"/>
+          </a:solidFill>
+          <a:ln>
+            <a:noFill/>
+          </a:ln>
+          <a:effectLst/>
+        </p:spPr>
+        <p:style>
+          <a:lnRef idx="1">
+            <a:schemeClr val="accent1"/>
+          </a:lnRef>
+          <a:fillRef idx="3">
+            <a:schemeClr val="accent1"/>
+          </a:fillRef>
+          <a:effectRef idx="2">
+            <a:schemeClr val="accent1"/>
+          </a:effectRef>
+          <a:fontRef idx="minor">
+            <a:schemeClr val="lt1"/>
+          </a:fontRef>
+        </p:style>
+        <p:txBody>
+          <a:bodyPr rtlCol="0" anchor="ctr"/>
+          <a:lstStyle/>
+          <a:p>
+            <a:pPr algn="ctr"/>
+          </a:p>
+        </p:txBody>
+      </p:sp>
+      <p:sp>
+        <p:nvSpPr>
+          <p:cNvPr id="15" name="TextBox 14"/>
+          <p:cNvSpPr txBox="1"/>
+          <p:nvPr/>
+        </p:nvSpPr>
+        <p:spPr>
+          <a:xfrm>
+            <a:off x="8158276" y="1417320"/>
+            <a:ext cx="3576218" cy="566928"/>
+          </a:xfrm>
+          <a:prstGeom prst="rect">
+            <a:avLst/>
+          </a:prstGeom>
+          <a:noFill/>
+        </p:spPr>
+        <p:txBody>
+          <a:bodyPr wrap="square" anchor="ctr" lIns="76200" rIns="76200" tIns="25400" bIns="25400">
+            <a:spAutoFit/>
+          </a:bodyPr>
+          <a:lstStyle/>
+          <a:p>
+            <a:r>
+              <a:rPr sz="1600" b="1">
+                <a:solidFill>
+                  <a:srgbClr val="FFFFFF"/>
+                </a:solidFill>
+                <a:latin typeface="微软雅黑"/>
+                <a:ea typeface="微软雅黑"/>
+              </a:rPr>
+              <a:t>🛠 技术代码</a:t>
+            </a:r>
+          </a:p>
+        </p:txBody>
+      </p:sp>
+      <p:sp>
+        <p:nvSpPr>
+          <p:cNvPr id="16" name="TextBox 15"/>
+          <p:cNvSpPr txBox="1"/>
+          <p:nvPr/>
+        </p:nvSpPr>
+        <p:spPr>
+          <a:xfrm>
+            <a:off x="8268004" y="2103120"/>
+            <a:ext cx="3356762" cy="4023360"/>
+          </a:xfrm>
+          <a:prstGeom prst="rect">
+            <a:avLst/>
+          </a:prstGeom>
+          <a:noFill/>
+        </p:spPr>
+        <p:txBody>
+          <a:bodyPr wrap="square">
+            <a:spAutoFit/>
+          </a:bodyPr>
+          <a:lstStyle/>
+          <a:p>
+            <a:pPr>
+              <a:spcAft>
+                <a:spcPts val="900"/>
+              </a:spcAft>
+            </a:pPr>
+            <a:r>
+              <a:rPr sz="1250" b="0">
+                <a:solidFill>
+                  <a:srgbClr val="404040"/>
+                </a:solidFill>
+                <a:latin typeface="微软雅黑"/>
+                <a:ea typeface="微软雅黑"/>
+              </a:rPr>
+              <a:t>• 风控框重复渲染 → 定位并删重复代码</a:t>
+            </a:r>
+          </a:p>
+          <a:p>
+            <a:pPr>
+              <a:spcAft>
+                <a:spcPts val="900"/>
+              </a:spcAft>
+            </a:pPr>
+            <a:r>
+              <a:rPr sz="1250" b="0">
+                <a:solidFill>
+                  <a:srgbClr val="404040"/>
+                </a:solidFill>
+                <a:latin typeface="微软雅黑"/>
+                <a:ea typeface="微软雅黑"/>
+              </a:rPr>
+              <a:t>• 合规红线夸大宣传 → 改词+固定免责声明</a:t>
+            </a:r>
+          </a:p>
+          <a:p>
+            <a:pPr>
+              <a:spcAft>
+                <a:spcPts val="900"/>
+              </a:spcAft>
+            </a:pPr>
+            <a:r>
+              <a:rPr sz="1250" b="0">
+                <a:solidFill>
+                  <a:srgbClr val="404040"/>
+                </a:solidFill>
+                <a:latin typeface="微软雅黑"/>
+                <a:ea typeface="微软雅黑"/>
+              </a:rPr>
+              <a:t>• 该不该全用AI → 核心用确定性规则引擎</a:t>
+            </a:r>
+          </a:p>
+          <a:p>
+            <a:pPr>
+              <a:spcAft>
+                <a:spcPts val="900"/>
+              </a:spcAft>
+            </a:pPr>
+            <a:r>
+              <a:rPr sz="1250" b="0">
+                <a:solidFill>
+                  <a:srgbClr val="404040"/>
+                </a:solidFill>
+                <a:latin typeface="微软雅黑"/>
+                <a:ea typeface="微软雅黑"/>
+              </a:rPr>
+              <a:t>• 如何证明有用 → 自建埋点+转化漏斗看板</a:t>
+            </a:r>
+          </a:p>
+        </p:txBody>
+      </p:sp>
+      <p:sp>
+        <p:nvSpPr>
+          <p:cNvPr id="17" name="TextBox 16"/>
+          <p:cNvSpPr txBox="1"/>
+          <p:nvPr/>
+        </p:nvSpPr>
+        <p:spPr>
+          <a:xfrm>
+            <a:off x="457200" y="6355080"/>
+            <a:ext cx="11247120" cy="411480"/>
+          </a:xfrm>
+          <a:prstGeom prst="rect">
+            <a:avLst/>
+          </a:prstGeom>
+          <a:noFill/>
+        </p:spPr>
+        <p:txBody>
+          <a:bodyPr wrap="square" anchor="ctr" lIns="76200" rIns="76200" tIns="25400" bIns="25400">
+            <a:spAutoFit/>
+          </a:bodyPr>
+          <a:lstStyle/>
+          <a:p>
+            <a:r>
+              <a:rPr sz="1200" b="0">
+                <a:solidFill>
+                  <a:srgbClr val="707070"/>
+                </a:solidFill>
+                <a:latin typeface="微软雅黑"/>
+                <a:ea typeface="微软雅黑"/>
+              </a:rPr>
+              <a:t>口述:每一个问题都对应真实决策——部署碰壁体现韧性,精简版体现取舍,数据看板体现数据驱动。</a:t>
             </a:r>
           </a:p>
         </p:txBody>
